--- a/generated/Tier 1 Broker Scorecards/Power Commercial Insurance Brokers_Broker_Scorecard.pptx
+++ b/generated/Tier 1 Broker Scorecards/Power Commercial Insurance Brokers_Broker_Scorecard.pptx
@@ -3394,7 +3394,7 @@
                         <a:rPr sz="900">
                           <a:latin typeface="Segoe UI"/>
                         </a:rPr>
-                        <a:t>Tier 1  |  6.73% / 15.00%</a:t>
+                        <a:t>Tier 1  |  6.25% / 15.00%</a:t>
                       </a:r>
                     </a:p>
                   </a:txBody>
@@ -3690,7 +3690,7 @@
                         <a:rPr sz="900">
                           <a:latin typeface="Segoe UI"/>
                         </a:rPr>
-                        <a:t>Fleet Bound Premium: $49,867.94</a:t>
+                        <a:t>Fleet Bound Premium: $56,724.22</a:t>
                       </a:r>
                     </a:p>
                   </a:txBody>
@@ -3727,7 +3727,7 @@
                         <a:rPr sz="900">
                           <a:latin typeface="Segoe UI"/>
                         </a:rPr>
-                        <a:t>Fleet Book %: 11.3%</a:t>
+                        <a:t>Fleet Book %: 12.8%</a:t>
                       </a:r>
                     </a:p>
                   </a:txBody>
@@ -3766,7 +3766,7 @@
                         <a:rPr sz="900">
                           <a:latin typeface="Segoe UI"/>
                         </a:rPr>
-                        <a:t>Non-Fleet Subs: 193  |  Binds: 13</a:t>
+                        <a:t>Non-Fleet Subs: 193  |  Binds: 12</a:t>
                       </a:r>
                     </a:p>
                   </a:txBody>
@@ -3803,7 +3803,7 @@
                         <a:rPr sz="900">
                           <a:latin typeface="Segoe UI"/>
                         </a:rPr>
-                        <a:t>Non-Fleet Bound Premium: $391,701.49</a:t>
+                        <a:t>Non-Fleet Bound Premium: $384,845.21</a:t>
                       </a:r>
                     </a:p>
                   </a:txBody>
@@ -3840,7 +3840,7 @@
                         <a:rPr sz="900">
                           <a:latin typeface="Segoe UI"/>
                         </a:rPr>
-                        <a:t>Non-Fleet Book %: 88.7%</a:t>
+                        <a:t>Non-Fleet Book %: 87.2%</a:t>
                       </a:r>
                     </a:p>
                   </a:txBody>
@@ -4581,7 +4581,7 @@
                         <a:rPr sz="800">
                           <a:latin typeface="Segoe UI"/>
                         </a:rPr>
-                        <a:t>14.2%</a:t>
+                        <a:t>11.7%</a:t>
                       </a:r>
                     </a:p>
                   </a:txBody>
@@ -4664,7 +4664,7 @@
                         <a:rPr sz="800">
                           <a:latin typeface="Segoe UI"/>
                         </a:rPr>
-                        <a:t>11.3%</a:t>
+                        <a:t>13.4%</a:t>
                       </a:r>
                     </a:p>
                   </a:txBody>
@@ -4703,7 +4703,7 @@
                       <a:r>
                         <a:rPr sz="800">
                           <a:solidFill>
-                            <a:srgbClr val="059669"/>
+                            <a:srgbClr val="DC2626"/>
                           </a:solidFill>
                           <a:latin typeface="Segoe UI"/>
                         </a:rPr>
@@ -4866,7 +4866,7 @@
                         <a:rPr sz="800">
                           <a:latin typeface="Segoe UI"/>
                         </a:rPr>
-                        <a:t>17</a:t>
+                        <a:t>14</a:t>
                       </a:r>
                     </a:p>
                   </a:txBody>
@@ -4943,7 +4943,7 @@
                         <a:rPr sz="800">
                           <a:latin typeface="Segoe UI"/>
                         </a:rPr>
-                        <a:t>11</a:t>
+                        <a:t>13</a:t>
                       </a:r>
                     </a:p>
                   </a:txBody>

--- a/generated/Tier 1 Broker Scorecards/Power Commercial Insurance Brokers_Broker_Scorecard.pptx
+++ b/generated/Tier 1 Broker Scorecards/Power Commercial Insurance Brokers_Broker_Scorecard.pptx
@@ -3394,7 +3394,7 @@
                         <a:rPr sz="900">
                           <a:latin typeface="Segoe UI"/>
                         </a:rPr>
-                        <a:t>Tier 1  |  6.25% / 15.00%</a:t>
+                        <a:t>Tier 1  |  6.10% / 15.00%</a:t>
                       </a:r>
                     </a:p>
                   </a:txBody>
@@ -3766,7 +3766,7 @@
                         <a:rPr sz="900">
                           <a:latin typeface="Segoe UI"/>
                         </a:rPr>
-                        <a:t>Non-Fleet Subs: 193  |  Binds: 12</a:t>
+                        <a:t>Non-Fleet Subs: 198  |  Binds: 12</a:t>
                       </a:r>
                     </a:p>
                   </a:txBody>
@@ -4428,7 +4428,7 @@
                           </a:solidFill>
                           <a:latin typeface="Segoe UI"/>
                         </a:rPr>
-                        <a:t>41</a:t>
+                        <a:t>46</a:t>
                       </a:r>
                     </a:p>
                   </a:txBody>
@@ -4581,7 +4581,7 @@
                         <a:rPr sz="800">
                           <a:latin typeface="Segoe UI"/>
                         </a:rPr>
-                        <a:t>11.7%</a:t>
+                        <a:t>13.3%</a:t>
                       </a:r>
                     </a:p>
                   </a:txBody>
@@ -4707,7 +4707,7 @@
                           </a:solidFill>
                           <a:latin typeface="Segoe UI"/>
                         </a:rPr>
-                        <a:t>12.2%</a:t>
+                        <a:t>10.9%</a:t>
                       </a:r>
                     </a:p>
                   </a:txBody>
@@ -4866,7 +4866,7 @@
                         <a:rPr sz="800">
                           <a:latin typeface="Segoe UI"/>
                         </a:rPr>
-                        <a:t>14</a:t>
+                        <a:t>16</a:t>
                       </a:r>
                     </a:p>
                   </a:txBody>

--- a/generated/Tier 1 Broker Scorecards/Power Commercial Insurance Brokers_Broker_Scorecard.pptx
+++ b/generated/Tier 1 Broker Scorecards/Power Commercial Insurance Brokers_Broker_Scorecard.pptx
@@ -3394,7 +3394,7 @@
                         <a:rPr sz="900">
                           <a:latin typeface="Segoe UI"/>
                         </a:rPr>
-                        <a:t>Tier 1  |  6.10% / 15.00%</a:t>
+                        <a:t>Tier 1  |  5.94% / 15.00%</a:t>
                       </a:r>
                     </a:p>
                   </a:txBody>
@@ -3653,7 +3653,7 @@
                         <a:rPr sz="900">
                           <a:latin typeface="Segoe UI"/>
                         </a:rPr>
-                        <a:t>Fleet Subs: 15  |  Binds: 1</a:t>
+                        <a:t>Fleet Subs: 17  |  Binds: 1</a:t>
                       </a:r>
                     </a:p>
                   </a:txBody>
@@ -3766,7 +3766,7 @@
                         <a:rPr sz="900">
                           <a:latin typeface="Segoe UI"/>
                         </a:rPr>
-                        <a:t>Non-Fleet Subs: 198  |  Binds: 12</a:t>
+                        <a:t>Non-Fleet Subs: 202  |  Binds: 12</a:t>
                       </a:r>
                     </a:p>
                   </a:txBody>
@@ -4428,7 +4428,7 @@
                           </a:solidFill>
                           <a:latin typeface="Segoe UI"/>
                         </a:rPr>
-                        <a:t>46</a:t>
+                        <a:t>52</a:t>
                       </a:r>
                     </a:p>
                   </a:txBody>
@@ -4581,7 +4581,7 @@
                         <a:rPr sz="800">
                           <a:latin typeface="Segoe UI"/>
                         </a:rPr>
-                        <a:t>13.3%</a:t>
+                        <a:t>12.5%</a:t>
                       </a:r>
                     </a:p>
                   </a:txBody>
@@ -4664,7 +4664,7 @@
                         <a:rPr sz="800">
                           <a:latin typeface="Segoe UI"/>
                         </a:rPr>
-                        <a:t>13.4%</a:t>
+                        <a:t>12.4%</a:t>
                       </a:r>
                     </a:p>
                   </a:txBody>
@@ -4707,7 +4707,7 @@
                           </a:solidFill>
                           <a:latin typeface="Segoe UI"/>
                         </a:rPr>
-                        <a:t>10.9%</a:t>
+                        <a:t>9.6%</a:t>
                       </a:r>
                     </a:p>
                   </a:txBody>
@@ -4866,7 +4866,7 @@
                         <a:rPr sz="800">
                           <a:latin typeface="Segoe UI"/>
                         </a:rPr>
-                        <a:t>16</a:t>
+                        <a:t>15</a:t>
                       </a:r>
                     </a:p>
                   </a:txBody>
@@ -4943,7 +4943,7 @@
                         <a:rPr sz="800">
                           <a:latin typeface="Segoe UI"/>
                         </a:rPr>
-                        <a:t>13</a:t>
+                        <a:t>12</a:t>
                       </a:r>
                     </a:p>
                   </a:txBody>

--- a/generated/Tier 1 Broker Scorecards/Power Commercial Insurance Brokers_Broker_Scorecard.pptx
+++ b/generated/Tier 1 Broker Scorecards/Power Commercial Insurance Brokers_Broker_Scorecard.pptx
@@ -3394,7 +3394,7 @@
                         <a:rPr sz="900">
                           <a:latin typeface="Segoe UI"/>
                         </a:rPr>
-                        <a:t>Tier 1  |  5.94% / 15.00%</a:t>
+                        <a:t>Tier 1  |  6.39% / 15.00%</a:t>
                       </a:r>
                     </a:p>
                   </a:txBody>
@@ -3690,7 +3690,7 @@
                         <a:rPr sz="900">
                           <a:latin typeface="Segoe UI"/>
                         </a:rPr>
-                        <a:t>Fleet Bound Premium: $56,724.22</a:t>
+                        <a:t>Fleet Bound Premium: $54,410.12</a:t>
                       </a:r>
                     </a:p>
                   </a:txBody>
@@ -3727,7 +3727,7 @@
                         <a:rPr sz="900">
                           <a:latin typeface="Segoe UI"/>
                         </a:rPr>
-                        <a:t>Fleet Book %: 12.8%</a:t>
+                        <a:t>Fleet Book %: 12.3%</a:t>
                       </a:r>
                     </a:p>
                   </a:txBody>
@@ -3766,7 +3766,7 @@
                         <a:rPr sz="900">
                           <a:latin typeface="Segoe UI"/>
                         </a:rPr>
-                        <a:t>Non-Fleet Subs: 202  |  Binds: 12</a:t>
+                        <a:t>Non-Fleet Subs: 202  |  Binds: 13</a:t>
                       </a:r>
                     </a:p>
                   </a:txBody>
@@ -3803,7 +3803,7 @@
                         <a:rPr sz="900">
                           <a:latin typeface="Segoe UI"/>
                         </a:rPr>
-                        <a:t>Non-Fleet Bound Premium: $384,845.21</a:t>
+                        <a:t>Non-Fleet Bound Premium: $387,159.31</a:t>
                       </a:r>
                     </a:p>
                   </a:txBody>
@@ -3840,7 +3840,7 @@
                         <a:rPr sz="900">
                           <a:latin typeface="Segoe UI"/>
                         </a:rPr>
-                        <a:t>Non-Fleet Book %: 87.2%</a:t>
+                        <a:t>Non-Fleet Book %: 87.7%</a:t>
                       </a:r>
                     </a:p>
                   </a:txBody>
@@ -4581,7 +4581,7 @@
                         <a:rPr sz="800">
                           <a:latin typeface="Segoe UI"/>
                         </a:rPr>
-                        <a:t>12.5%</a:t>
+                        <a:t>11.7%</a:t>
                       </a:r>
                     </a:p>
                   </a:txBody>
@@ -4664,7 +4664,7 @@
                         <a:rPr sz="800">
                           <a:latin typeface="Segoe UI"/>
                         </a:rPr>
-                        <a:t>12.4%</a:t>
+                        <a:t>13.4%</a:t>
                       </a:r>
                     </a:p>
                   </a:txBody>
@@ -4866,7 +4866,7 @@
                         <a:rPr sz="800">
                           <a:latin typeface="Segoe UI"/>
                         </a:rPr>
-                        <a:t>15</a:t>
+                        <a:t>14</a:t>
                       </a:r>
                     </a:p>
                   </a:txBody>
@@ -4943,7 +4943,7 @@
                         <a:rPr sz="800">
                           <a:latin typeface="Segoe UI"/>
                         </a:rPr>
-                        <a:t>12</a:t>
+                        <a:t>13</a:t>
                       </a:r>
                     </a:p>
                   </a:txBody>

--- a/generated/Tier 1 Broker Scorecards/Power Commercial Insurance Brokers_Broker_Scorecard.pptx
+++ b/generated/Tier 1 Broker Scorecards/Power Commercial Insurance Brokers_Broker_Scorecard.pptx
@@ -3394,7 +3394,7 @@
                         <a:rPr sz="900">
                           <a:latin typeface="Segoe UI"/>
                         </a:rPr>
-                        <a:t>Tier 1  |  6.39% / 15.00%</a:t>
+                        <a:t>Tier 1  |  6.36% / 15.00%</a:t>
                       </a:r>
                     </a:p>
                   </a:txBody>
@@ -3690,7 +3690,7 @@
                         <a:rPr sz="900">
                           <a:latin typeface="Segoe UI"/>
                         </a:rPr>
-                        <a:t>Fleet Bound Premium: $54,410.12</a:t>
+                        <a:t>Fleet Bound Premium: $52,318.02</a:t>
                       </a:r>
                     </a:p>
                   </a:txBody>
@@ -3727,7 +3727,7 @@
                         <a:rPr sz="900">
                           <a:latin typeface="Segoe UI"/>
                         </a:rPr>
-                        <a:t>Fleet Book %: 12.3%</a:t>
+                        <a:t>Fleet Book %: 11.8%</a:t>
                       </a:r>
                     </a:p>
                   </a:txBody>
@@ -3766,7 +3766,7 @@
                         <a:rPr sz="900">
                           <a:latin typeface="Segoe UI"/>
                         </a:rPr>
-                        <a:t>Non-Fleet Subs: 202  |  Binds: 13</a:t>
+                        <a:t>Non-Fleet Subs: 203  |  Binds: 13</a:t>
                       </a:r>
                     </a:p>
                   </a:txBody>
@@ -3803,7 +3803,7 @@
                         <a:rPr sz="900">
                           <a:latin typeface="Segoe UI"/>
                         </a:rPr>
-                        <a:t>Non-Fleet Bound Premium: $387,159.31</a:t>
+                        <a:t>Non-Fleet Bound Premium: $389,251.41</a:t>
                       </a:r>
                     </a:p>
                   </a:txBody>
@@ -3840,7 +3840,7 @@
                         <a:rPr sz="900">
                           <a:latin typeface="Segoe UI"/>
                         </a:rPr>
-                        <a:t>Non-Fleet Book %: 87.7%</a:t>
+                        <a:t>Non-Fleet Book %: 88.2%</a:t>
                       </a:r>
                     </a:p>
                   </a:txBody>
@@ -4428,7 +4428,7 @@
                           </a:solidFill>
                           <a:latin typeface="Segoe UI"/>
                         </a:rPr>
-                        <a:t>52</a:t>
+                        <a:t>53</a:t>
                       </a:r>
                     </a:p>
                   </a:txBody>
@@ -4664,7 +4664,7 @@
                         <a:rPr sz="800">
                           <a:latin typeface="Segoe UI"/>
                         </a:rPr>
-                        <a:t>13.4%</a:t>
+                        <a:t>12.4%</a:t>
                       </a:r>
                     </a:p>
                   </a:txBody>
@@ -4707,7 +4707,7 @@
                           </a:solidFill>
                           <a:latin typeface="Segoe UI"/>
                         </a:rPr>
-                        <a:t>9.6%</a:t>
+                        <a:t>9.4%</a:t>
                       </a:r>
                     </a:p>
                   </a:txBody>
@@ -4943,7 +4943,7 @@
                         <a:rPr sz="800">
                           <a:latin typeface="Segoe UI"/>
                         </a:rPr>
-                        <a:t>13</a:t>
+                        <a:t>12</a:t>
                       </a:r>
                     </a:p>
                   </a:txBody>

--- a/generated/Tier 1 Broker Scorecards/Power Commercial Insurance Brokers_Broker_Scorecard.pptx
+++ b/generated/Tier 1 Broker Scorecards/Power Commercial Insurance Brokers_Broker_Scorecard.pptx
@@ -4581,7 +4581,7 @@
                         <a:rPr sz="800">
                           <a:latin typeface="Segoe UI"/>
                         </a:rPr>
-                        <a:t>11.7%</a:t>
+                        <a:t>13.3%</a:t>
                       </a:r>
                     </a:p>
                   </a:txBody>
@@ -4866,7 +4866,7 @@
                         <a:rPr sz="800">
                           <a:latin typeface="Segoe UI"/>
                         </a:rPr>
-                        <a:t>14</a:t>
+                        <a:t>16</a:t>
                       </a:r>
                     </a:p>
                   </a:txBody>

--- a/generated/Tier 1 Broker Scorecards/Power Commercial Insurance Brokers_Broker_Scorecard.pptx
+++ b/generated/Tier 1 Broker Scorecards/Power Commercial Insurance Brokers_Broker_Scorecard.pptx
@@ -4581,7 +4581,7 @@
                         <a:rPr sz="800">
                           <a:latin typeface="Segoe UI"/>
                         </a:rPr>
-                        <a:t>13.3%</a:t>
+                        <a:t>12.5%</a:t>
                       </a:r>
                     </a:p>
                   </a:txBody>
@@ -4866,7 +4866,7 @@
                         <a:rPr sz="800">
                           <a:latin typeface="Segoe UI"/>
                         </a:rPr>
-                        <a:t>16</a:t>
+                        <a:t>15</a:t>
                       </a:r>
                     </a:p>
                   </a:txBody>

--- a/generated/Tier 1 Broker Scorecards/Power Commercial Insurance Brokers_Broker_Scorecard.pptx
+++ b/generated/Tier 1 Broker Scorecards/Power Commercial Insurance Brokers_Broker_Scorecard.pptx
@@ -3394,7 +3394,7 @@
                         <a:rPr sz="900">
                           <a:latin typeface="Segoe UI"/>
                         </a:rPr>
-                        <a:t>Tier 1  |  6.36% / 15.00%</a:t>
+                        <a:t>Tier 1  |  6.31% / 15.00%</a:t>
                       </a:r>
                     </a:p>
                   </a:txBody>
@@ -3766,7 +3766,7 @@
                         <a:rPr sz="900">
                           <a:latin typeface="Segoe UI"/>
                         </a:rPr>
-                        <a:t>Non-Fleet Subs: 203  |  Binds: 13</a:t>
+                        <a:t>Non-Fleet Subs: 205  |  Binds: 13</a:t>
                       </a:r>
                     </a:p>
                   </a:txBody>
@@ -4428,7 +4428,7 @@
                           </a:solidFill>
                           <a:latin typeface="Segoe UI"/>
                         </a:rPr>
-                        <a:t>53</a:t>
+                        <a:t>55</a:t>
                       </a:r>
                     </a:p>
                   </a:txBody>
@@ -4581,7 +4581,7 @@
                         <a:rPr sz="800">
                           <a:latin typeface="Segoe UI"/>
                         </a:rPr>
-                        <a:t>12.5%</a:t>
+                        <a:t>10.8%</a:t>
                       </a:r>
                     </a:p>
                   </a:txBody>
@@ -4707,7 +4707,7 @@
                           </a:solidFill>
                           <a:latin typeface="Segoe UI"/>
                         </a:rPr>
-                        <a:t>9.4%</a:t>
+                        <a:t>9.1%</a:t>
                       </a:r>
                     </a:p>
                   </a:txBody>
@@ -4866,7 +4866,7 @@
                         <a:rPr sz="800">
                           <a:latin typeface="Segoe UI"/>
                         </a:rPr>
-                        <a:t>15</a:t>
+                        <a:t>13</a:t>
                       </a:r>
                     </a:p>
                   </a:txBody>

--- a/generated/Tier 1 Broker Scorecards/Power Commercial Insurance Brokers_Broker_Scorecard.pptx
+++ b/generated/Tier 1 Broker Scorecards/Power Commercial Insurance Brokers_Broker_Scorecard.pptx
@@ -3357,7 +3357,7 @@
                         <a:rPr sz="800">
                           <a:latin typeface="Segoe UI"/>
                         </a:rPr>
-                        <a:t>$2,372,090.60 / $1,142,860.50 / $441,569.43</a:t>
+                        <a:t>$2,372,090.60 / $1,202,124.01 / $500,832.94</a:t>
                       </a:r>
                     </a:p>
                   </a:txBody>
@@ -3394,7 +3394,7 @@
                         <a:rPr sz="900">
                           <a:latin typeface="Segoe UI"/>
                         </a:rPr>
-                        <a:t>Tier 1  |  6.31% / 15.00%</a:t>
+                        <a:t>Tier 1  |  6.73% / 15.00%</a:t>
                       </a:r>
                     </a:p>
                   </a:txBody>
@@ -3431,7 +3431,7 @@
                         <a:rPr sz="900">
                           <a:latin typeface="Segoe UI"/>
                         </a:rPr>
-                        <a:t>$3,320,926.84  (13.3% achieved)</a:t>
+                        <a:t>$3,320,926.84  (15.1% achieved)</a:t>
                       </a:r>
                     </a:p>
                   </a:txBody>
@@ -3653,7 +3653,7 @@
                         <a:rPr sz="900">
                           <a:latin typeface="Segoe UI"/>
                         </a:rPr>
-                        <a:t>Fleet Subs: 17  |  Binds: 1</a:t>
+                        <a:t>Fleet Subs: 17  |  Binds: 2</a:t>
                       </a:r>
                     </a:p>
                   </a:txBody>
@@ -3690,7 +3690,7 @@
                         <a:rPr sz="900">
                           <a:latin typeface="Segoe UI"/>
                         </a:rPr>
-                        <a:t>Fleet Bound Premium: $52,318.02</a:t>
+                        <a:t>Fleet Bound Premium: $105,230.22</a:t>
                       </a:r>
                     </a:p>
                   </a:txBody>
@@ -3727,7 +3727,7 @@
                         <a:rPr sz="900">
                           <a:latin typeface="Segoe UI"/>
                         </a:rPr>
-                        <a:t>Fleet Book %: 11.8%</a:t>
+                        <a:t>Fleet Book %: 21.0%</a:t>
                       </a:r>
                     </a:p>
                   </a:txBody>
@@ -3766,7 +3766,7 @@
                         <a:rPr sz="900">
                           <a:latin typeface="Segoe UI"/>
                         </a:rPr>
-                        <a:t>Non-Fleet Subs: 205  |  Binds: 13</a:t>
+                        <a:t>Non-Fleet Subs: 206  |  Binds: 13</a:t>
                       </a:r>
                     </a:p>
                   </a:txBody>
@@ -3803,7 +3803,7 @@
                         <a:rPr sz="900">
                           <a:latin typeface="Segoe UI"/>
                         </a:rPr>
-                        <a:t>Non-Fleet Bound Premium: $389,251.41</a:t>
+                        <a:t>Non-Fleet Bound Premium: $395,602.72</a:t>
                       </a:r>
                     </a:p>
                   </a:txBody>
@@ -3840,7 +3840,7 @@
                         <a:rPr sz="900">
                           <a:latin typeface="Segoe UI"/>
                         </a:rPr>
-                        <a:t>Non-Fleet Book %: 88.2%</a:t>
+                        <a:t>Non-Fleet Book %: 79.0%</a:t>
                       </a:r>
                     </a:p>
                   </a:txBody>
@@ -4428,7 +4428,7 @@
                           </a:solidFill>
                           <a:latin typeface="Segoe UI"/>
                         </a:rPr>
-                        <a:t>55</a:t>
+                        <a:t>56</a:t>
                       </a:r>
                     </a:p>
                   </a:txBody>
@@ -4581,7 +4581,7 @@
                         <a:rPr sz="800">
                           <a:latin typeface="Segoe UI"/>
                         </a:rPr>
-                        <a:t>10.8%</a:t>
+                        <a:t>11.7%</a:t>
                       </a:r>
                     </a:p>
                   </a:txBody>
@@ -4664,7 +4664,7 @@
                         <a:rPr sz="800">
                           <a:latin typeface="Segoe UI"/>
                         </a:rPr>
-                        <a:t>12.4%</a:t>
+                        <a:t>13.4%</a:t>
                       </a:r>
                     </a:p>
                   </a:txBody>
@@ -4707,7 +4707,7 @@
                           </a:solidFill>
                           <a:latin typeface="Segoe UI"/>
                         </a:rPr>
-                        <a:t>9.1%</a:t>
+                        <a:t>8.9%</a:t>
                       </a:r>
                     </a:p>
                   </a:txBody>
@@ -4866,7 +4866,7 @@
                         <a:rPr sz="800">
                           <a:latin typeface="Segoe UI"/>
                         </a:rPr>
-                        <a:t>13</a:t>
+                        <a:t>14</a:t>
                       </a:r>
                     </a:p>
                   </a:txBody>
@@ -4943,7 +4943,7 @@
                         <a:rPr sz="800">
                           <a:latin typeface="Segoe UI"/>
                         </a:rPr>
-                        <a:t>12</a:t>
+                        <a:t>13</a:t>
                       </a:r>
                     </a:p>
                   </a:txBody>
@@ -5262,7 +5262,7 @@
                           </a:solidFill>
                           <a:latin typeface="Segoe UI"/>
                         </a:rPr>
-                        <a:t>$45.2K</a:t>
+                        <a:t>$104.4K</a:t>
                       </a:r>
                     </a:p>
                   </a:txBody>

--- a/generated/Tier 1 Broker Scorecards/Power Commercial Insurance Brokers_Broker_Scorecard.pptx
+++ b/generated/Tier 1 Broker Scorecards/Power Commercial Insurance Brokers_Broker_Scorecard.pptx
@@ -4581,7 +4581,7 @@
                         <a:rPr sz="800">
                           <a:latin typeface="Segoe UI"/>
                         </a:rPr>
-                        <a:t>11.7%</a:t>
+                        <a:t>12.5%</a:t>
                       </a:r>
                     </a:p>
                   </a:txBody>
@@ -4664,7 +4664,7 @@
                         <a:rPr sz="800">
                           <a:latin typeface="Segoe UI"/>
                         </a:rPr>
-                        <a:t>13.4%</a:t>
+                        <a:t>12.4%</a:t>
                       </a:r>
                     </a:p>
                   </a:txBody>
@@ -4866,7 +4866,7 @@
                         <a:rPr sz="800">
                           <a:latin typeface="Segoe UI"/>
                         </a:rPr>
-                        <a:t>14</a:t>
+                        <a:t>15</a:t>
                       </a:r>
                     </a:p>
                   </a:txBody>
@@ -4943,7 +4943,7 @@
                         <a:rPr sz="800">
                           <a:latin typeface="Segoe UI"/>
                         </a:rPr>
-                        <a:t>13</a:t>
+                        <a:t>12</a:t>
                       </a:r>
                     </a:p>
                   </a:txBody>

--- a/generated/Tier 1 Broker Scorecards/Power Commercial Insurance Brokers_Broker_Scorecard.pptx
+++ b/generated/Tier 1 Broker Scorecards/Power Commercial Insurance Brokers_Broker_Scorecard.pptx
@@ -3394,7 +3394,7 @@
                         <a:rPr sz="900">
                           <a:latin typeface="Segoe UI"/>
                         </a:rPr>
-                        <a:t>Tier 1  |  6.73% / 15.00%</a:t>
+                        <a:t>Tier 1  |  6.28% / 15.00%</a:t>
                       </a:r>
                     </a:p>
                   </a:txBody>
@@ -3653,7 +3653,7 @@
                         <a:rPr sz="900">
                           <a:latin typeface="Segoe UI"/>
                         </a:rPr>
-                        <a:t>Fleet Subs: 17  |  Binds: 2</a:t>
+                        <a:t>Fleet Subs: 17  |  Binds: 1</a:t>
                       </a:r>
                     </a:p>
                   </a:txBody>
@@ -3690,7 +3690,7 @@
                         <a:rPr sz="900">
                           <a:latin typeface="Segoe UI"/>
                         </a:rPr>
-                        <a:t>Fleet Bound Premium: $105,230.22</a:t>
+                        <a:t>Fleet Bound Premium: $59,339.68</a:t>
                       </a:r>
                     </a:p>
                   </a:txBody>
@@ -3727,7 +3727,7 @@
                         <a:rPr sz="900">
                           <a:latin typeface="Segoe UI"/>
                         </a:rPr>
-                        <a:t>Fleet Book %: 21.0%</a:t>
+                        <a:t>Fleet Book %: 11.8%</a:t>
                       </a:r>
                     </a:p>
                   </a:txBody>
@@ -3803,7 +3803,7 @@
                         <a:rPr sz="900">
                           <a:latin typeface="Segoe UI"/>
                         </a:rPr>
-                        <a:t>Non-Fleet Bound Premium: $395,602.72</a:t>
+                        <a:t>Non-Fleet Bound Premium: $441,493.26</a:t>
                       </a:r>
                     </a:p>
                   </a:txBody>
@@ -3840,7 +3840,7 @@
                         <a:rPr sz="900">
                           <a:latin typeface="Segoe UI"/>
                         </a:rPr>
-                        <a:t>Non-Fleet Book %: 79.0%</a:t>
+                        <a:t>Non-Fleet Book %: 88.2%</a:t>
                       </a:r>
                     </a:p>
                   </a:txBody>
@@ -4428,7 +4428,7 @@
                           </a:solidFill>
                           <a:latin typeface="Segoe UI"/>
                         </a:rPr>
-                        <a:t>56</a:t>
+                        <a:t>57</a:t>
                       </a:r>
                     </a:p>
                   </a:txBody>
@@ -4664,7 +4664,7 @@
                         <a:rPr sz="800">
                           <a:latin typeface="Segoe UI"/>
                         </a:rPr>
-                        <a:t>12.4%</a:t>
+                        <a:t>13.4%</a:t>
                       </a:r>
                     </a:p>
                   </a:txBody>
@@ -4707,7 +4707,7 @@
                           </a:solidFill>
                           <a:latin typeface="Segoe UI"/>
                         </a:rPr>
-                        <a:t>8.9%</a:t>
+                        <a:t>8.8%</a:t>
                       </a:r>
                     </a:p>
                   </a:txBody>
@@ -4943,7 +4943,7 @@
                         <a:rPr sz="800">
                           <a:latin typeface="Segoe UI"/>
                         </a:rPr>
-                        <a:t>12</a:t>
+                        <a:t>13</a:t>
                       </a:r>
                     </a:p>
                   </a:txBody>

--- a/generated/Tier 1 Broker Scorecards/Power Commercial Insurance Brokers_Broker_Scorecard.pptx
+++ b/generated/Tier 1 Broker Scorecards/Power Commercial Insurance Brokers_Broker_Scorecard.pptx
@@ -4664,7 +4664,7 @@
                         <a:rPr sz="800">
                           <a:latin typeface="Segoe UI"/>
                         </a:rPr>
-                        <a:t>13.4%</a:t>
+                        <a:t>11.3%</a:t>
                       </a:r>
                     </a:p>
                   </a:txBody>
@@ -4943,7 +4943,7 @@
                         <a:rPr sz="800">
                           <a:latin typeface="Segoe UI"/>
                         </a:rPr>
-                        <a:t>13</a:t>
+                        <a:t>11</a:t>
                       </a:r>
                     </a:p>
                   </a:txBody>

--- a/generated/Tier 1 Broker Scorecards/Power Commercial Insurance Brokers_Broker_Scorecard.pptx
+++ b/generated/Tier 1 Broker Scorecards/Power Commercial Insurance Brokers_Broker_Scorecard.pptx
@@ -3357,7 +3357,7 @@
                         <a:rPr sz="800">
                           <a:latin typeface="Segoe UI"/>
                         </a:rPr>
-                        <a:t>$2,372,090.60 / $1,202,124.01 / $500,832.94</a:t>
+                        <a:t>$2,372,090.60 / $1,088,001.71 / $500,832.94</a:t>
                       </a:r>
                     </a:p>
                   </a:txBody>
@@ -3394,7 +3394,7 @@
                         <a:rPr sz="900">
                           <a:latin typeface="Segoe UI"/>
                         </a:rPr>
-                        <a:t>Tier 1  |  6.28% / 15.00%</a:t>
+                        <a:t>Tier 1  |  6.25% / 15.00%</a:t>
                       </a:r>
                     </a:p>
                   </a:txBody>
@@ -3766,7 +3766,7 @@
                         <a:rPr sz="900">
                           <a:latin typeface="Segoe UI"/>
                         </a:rPr>
-                        <a:t>Non-Fleet Subs: 206  |  Binds: 13</a:t>
+                        <a:t>Non-Fleet Subs: 207  |  Binds: 13</a:t>
                       </a:r>
                     </a:p>
                   </a:txBody>
@@ -4428,7 +4428,7 @@
                           </a:solidFill>
                           <a:latin typeface="Segoe UI"/>
                         </a:rPr>
-                        <a:t>57</a:t>
+                        <a:t>58</a:t>
                       </a:r>
                     </a:p>
                   </a:txBody>
@@ -4500,9 +4500,12 @@
                       <a:pPr algn="ctr"/>
                       <a:r>
                         <a:rPr sz="800">
+                          <a:solidFill>
+                            <a:srgbClr val="DC2626"/>
+                          </a:solidFill>
                           <a:latin typeface="Segoe UI"/>
                         </a:rPr>
-                        <a:t/>
+                        <a:t>1</a:t>
                       </a:r>
                     </a:p>
                   </a:txBody>
@@ -4664,7 +4667,7 @@
                         <a:rPr sz="800">
                           <a:latin typeface="Segoe UI"/>
                         </a:rPr>
-                        <a:t>11.3%</a:t>
+                        <a:t>13.4%</a:t>
                       </a:r>
                     </a:p>
                   </a:txBody>
@@ -4707,7 +4710,7 @@
                           </a:solidFill>
                           <a:latin typeface="Segoe UI"/>
                         </a:rPr>
-                        <a:t>8.8%</a:t>
+                        <a:t>8.6%</a:t>
                       </a:r>
                     </a:p>
                   </a:txBody>
@@ -4943,7 +4946,7 @@
                         <a:rPr sz="800">
                           <a:latin typeface="Segoe UI"/>
                         </a:rPr>
-                        <a:t>11</a:t>
+                        <a:t>13</a:t>
                       </a:r>
                     </a:p>
                   </a:txBody>
